--- a/decks/architect-grpc-proxy-4-example-of-grpc-proxy-using-h2c/source/deck.pptx
+++ b/decks/architect-grpc-proxy-4-example-of-grpc-proxy-using-h2c/source/deck.pptx
@@ -1341,7 +1341,7 @@
                   <a:schemeClr val="dk1"/>
                 </a:solidFill>
               </a:rPr>
-              <a:t>"Once the setup is done, you can use grpcurl to send a test request through the Tyk Gateway. The -plaintext flag is important—it tells grpcurl not to use TLS, aligning with our h2c setup. If everything’s configured correctly, you'll see a friendly message returned: 'Hello joe'."</a:t>
+              <a:t>"Once the setup is done, you can use grpcurl to send a test request through the Tyk Gateway. The -plaintext flag is important—it tells grpcurl not to use TLS, aligning with our h2c setup. If everything’s configured correctly, you'll see a friendly message returned: 'Hello user'."</a:t>
             </a:r>
             <a:endParaRPr>
               <a:solidFill>
@@ -7992,7 +7992,7 @@
                 <a:cs typeface="Courier New"/>
                 <a:sym typeface="Courier New"/>
               </a:rPr>
-              <a:t>  -d '{"name": "joe"}' \</a:t>
+              <a:t>  -d '{"name": "user"}' \</a:t>
             </a:r>
             <a:endParaRPr>
               <a:solidFill>
@@ -8163,7 +8163,7 @@
                 <a:cs typeface="Courier New"/>
                 <a:sym typeface="Courier New"/>
               </a:rPr>
-              <a:t>{"message": "Hello joe"}</a:t>
+              <a:t>{"message": "Hello user"}</a:t>
             </a:r>
             <a:endParaRPr>
               <a:solidFill>
